--- a/PPO_RL_prj_20201622.pptx
+++ b/PPO_RL_prj_20201622.pptx
@@ -3406,8 +3406,13 @@
           <a:p>
             <a:r>
               <a:rPr lang="en-US" altLang="ko-KR" dirty="0"/>
-              <a:t>GitHub link : </a:t>
-            </a:r>
+              <a:t>GitHub link </a:t>
+            </a:r>
+            <a:r>
+              <a:rPr lang="en-US" altLang="ko-KR"/>
+              <a:t>: https://github.com/LucidLia/CartPole-v1_PPO_RLp_prj.git</a:t>
+            </a:r>
+            <a:endParaRPr lang="en-US" altLang="ko-KR" dirty="0"/>
           </a:p>
           <a:p>
             <a:endParaRPr lang="ko-KR" altLang="en-US" dirty="0"/>
